--- a/Plan-de-recrutement-presentation.pptx
+++ b/Plan-de-recrutement-presentation.pptx
@@ -3113,7 +3113,7 @@
                 <a:ea typeface="Cambria" pitchFamily="34" charset="-122"/>
                 <a:cs typeface="Cambria" pitchFamily="34" charset="-120"/>
               </a:rPr>
-              <a:t>Valeurs</a:t>
+              <a:t>Parcours et motivation</a:t>
             </a:r>
             <a:endParaRPr lang="en-US" sz="1700" dirty="0"/>
           </a:p>
@@ -3191,7 +3191,7 @@
                 <a:ea typeface="Calibri" pitchFamily="34" charset="-122"/>
                 <a:cs typeface="Calibri" pitchFamily="34" charset="-120"/>
               </a:rPr>
-              <a:t>60 min</a:t>
+              <a:t>55 min</a:t>
             </a:r>
             <a:endParaRPr lang="en-US" sz="1100" dirty="0"/>
           </a:p>
@@ -3233,7 +3233,7 @@
                 <a:ea typeface="Calibri" pitchFamily="34" charset="-122"/>
                 <a:cs typeface="Calibri" pitchFamily="34" charset="-120"/>
               </a:rPr>
-              <a:t>Expertise, humanité, justice, réparation. Cinq mises en situation où deux valeurs s'opposent.</a:t>
+              <a:t>Le parcours, ce qui met la personne en mouvement, et pourquoi ce cabinet. Aucun prérequis sur la matière.</a:t>
             </a:r>
             <a:endParaRPr lang="en-US" sz="1100" dirty="0"/>
           </a:p>
@@ -7458,7 +7458,7 @@
                 <a:ea typeface="Calibri" pitchFamily="34" charset="-122"/>
                 <a:cs typeface="Calibri" pitchFamily="34" charset="-120"/>
               </a:rPr>
-              <a:t>Une heure, tous les trois ensemble, avant le premier candidat. Chacun note un même cas fictif, seul, puis on compare.</a:t>
+              <a:t>Une heure, tous les trois ensemble, avant le premier entretien d'étape 3. Chacun note un même cas fictif, seul, puis on compare.</a:t>
             </a:r>
             <a:endParaRPr lang="en-US" sz="1250" dirty="0"/>
           </a:p>
@@ -8793,7 +8793,7 @@
                 <a:ea typeface="Calibri" pitchFamily="34" charset="-122"/>
                 <a:cs typeface="Calibri" pitchFamily="34" charset="-120"/>
               </a:rPr>
-              <a:t>Entretiens valeurs, métier et association</a:t>
+              <a:t>Entretiens parcours, métier et reprise</a:t>
             </a:r>
             <a:endParaRPr lang="en-US" sz="1100" dirty="0"/>
           </a:p>
@@ -10823,7 +10823,7 @@
                 <a:ea typeface="Calibri" pitchFamily="34" charset="-122"/>
                 <a:cs typeface="Calibri" pitchFamily="34" charset="-120"/>
               </a:rPr>
-              <a:t>Une heure, tous les trois ensemble, avant le premier entretien d'étape 2</a:t>
+              <a:t>Une heure, tous les trois ensemble, avant le premier entretien d'étape 3</a:t>
             </a:r>
             <a:endParaRPr lang="en-US" sz="1300" dirty="0"/>
           </a:p>

--- a/Plan-de-recrutement-presentation.pptx
+++ b/Plan-de-recrutement-presentation.pptx
@@ -3113,7 +3113,7 @@
                 <a:ea typeface="Cambria" pitchFamily="34" charset="-122"/>
                 <a:cs typeface="Cambria" pitchFamily="34" charset="-120"/>
               </a:rPr>
-              <a:t>Parcours et motivation</a:t>
+              <a:t>Valeurs</a:t>
             </a:r>
             <a:endParaRPr lang="en-US" sz="1700" dirty="0"/>
           </a:p>
@@ -3233,7 +3233,7 @@
                 <a:ea typeface="Calibri" pitchFamily="34" charset="-122"/>
                 <a:cs typeface="Calibri" pitchFamily="34" charset="-120"/>
               </a:rPr>
-              <a:t>Le parcours, ce qui met la personne en mouvement, et pourquoi ce cabinet. Aucun prérequis sur la matière.</a:t>
+              <a:t>Expertise, humanité, justice, réparation. Quatre séquences de douze minutes, sur des situations générales sans prérequis sur la matière.</a:t>
             </a:r>
             <a:endParaRPr lang="en-US" sz="1100" dirty="0"/>
           </a:p>
@@ -8793,7 +8793,7 @@
                 <a:ea typeface="Calibri" pitchFamily="34" charset="-122"/>
                 <a:cs typeface="Calibri" pitchFamily="34" charset="-120"/>
               </a:rPr>
-              <a:t>Entretiens parcours, métier et reprise</a:t>
+              <a:t>Entretiens valeurs, métier et reprise</a:t>
             </a:r>
             <a:endParaRPr lang="en-US" sz="1100" dirty="0"/>
           </a:p>
